--- a/atolye_icerik/sunumlar/05_iz_b_2d_3d.pptx
+++ b/atolye_icerik/sunumlar/05_iz_b_2d_3d.pptx
@@ -1887,7 +1887,7 @@
                 <a:ea typeface="Arial" pitchFamily="34" charset="-122"/>
                 <a:cs typeface="Arial" pitchFamily="34" charset="-120"/>
               </a:rPr>
-              <a:t>İZ B · 13:30 – 16:45 · SANAT + TEKNİK SANAT</a:t>
+              <a:t>İZ B · 15:15 – 16:45 · SANAT + TEKNİK SANAT</a:t>
             </a:r>
             <a:endParaRPr lang="en-US" sz="1300" dirty="0"/>
           </a:p>
@@ -3493,7 +3493,7 @@
                 <a:ea typeface="Arial" pitchFamily="34" charset="-122"/>
                 <a:cs typeface="Arial" pitchFamily="34" charset="-120"/>
               </a:rPr>
-              <a:t>LAB 2 · 15:45 – 16:45</a:t>
+              <a:t>LAB 2 · 16:15 – 16:45</a:t>
             </a:r>
             <a:endParaRPr lang="en-US" sz="1100" dirty="0"/>
           </a:p>
@@ -7625,7 +7625,7 @@
                 <a:ea typeface="Arial" pitchFamily="34" charset="-122"/>
                 <a:cs typeface="Arial" pitchFamily="34" charset="-120"/>
               </a:rPr>
-              <a:t>LAB 1 · 14:15 – 15:00</a:t>
+              <a:t>LAB 1 · 15:30 – 16:00</a:t>
             </a:r>
             <a:endParaRPr lang="en-US" sz="1100" dirty="0"/>
           </a:p>
@@ -8425,7 +8425,7 @@
                 <a:ea typeface="Arial" pitchFamily="34" charset="-122"/>
                 <a:cs typeface="Arial" pitchFamily="34" charset="-120"/>
               </a:rPr>
-              <a:t>15:00 – 15:15 ara; ardından 3D bölümü başlıyor.</a:t>
+              <a:t>16:00'da 3D bölümü başlıyor; Lab 2 16:15'te.</a:t>
             </a:r>
             <a:endParaRPr lang="en-US" sz="1200" dirty="0"/>
           </a:p>
